--- a/session4/exam-strategy/q4/q4_exam_strategy.pptx
+++ b/session4/exam-strategy/q4/q4_exam_strategy.pptx
@@ -3188,8 +3188,8 @@
         </p:nvSpPr>
         <p:spPr>
           <a:xfrm>
-            <a:off x="274320" y="685800"/>
-            <a:ext cx="6400800" cy="1645920"/>
+            <a:off x="274320" y="640080"/>
+            <a:ext cx="6583680" cy="1280160"/>
           </a:xfrm>
           <a:prstGeom prst="rect">
             <a:avLst/>
@@ -3197,13 +3197,13 @@
           <a:noFill/>
         </p:spPr>
         <p:txBody>
-          <a:bodyPr wrap="square">
+          <a:bodyPr wrap="square" tIns="0" bIns="0">
             <a:spAutoFit/>
           </a:bodyPr>
           <a:lstStyle/>
           <a:p>
             <a:pPr>
-              <a:defRPr sz="1100">
+              <a:defRPr sz="900">
                 <a:solidFill>
                   <a:srgbClr val="FFFFFF"/>
                 </a:solidFill>
@@ -3224,8 +3224,8 @@
         </p:nvSpPr>
         <p:spPr>
           <a:xfrm>
-            <a:off x="365760" y="2377440"/>
-            <a:ext cx="274320" cy="274320"/>
+            <a:off x="274320" y="2057400"/>
+            <a:ext cx="201168" cy="201168"/>
           </a:xfrm>
           <a:prstGeom prst="ellipse">
             <a:avLst/>
@@ -3256,7 +3256,7 @@
           <a:lstStyle/>
           <a:p>
             <a:pPr algn="ctr">
-              <a:defRPr sz="900" b="1">
+              <a:defRPr sz="700" b="1">
                 <a:solidFill>
                   <a:srgbClr val="FFFFFF"/>
                 </a:solidFill>
@@ -3276,8 +3276,8 @@
         </p:nvSpPr>
         <p:spPr>
           <a:xfrm>
-            <a:off x="777240" y="2377440"/>
-            <a:ext cx="5943600" cy="411480"/>
+            <a:off x="548640" y="2011680"/>
+            <a:ext cx="6400800" cy="585215"/>
           </a:xfrm>
           <a:prstGeom prst="rect">
             <a:avLst/>
@@ -3285,13 +3285,13 @@
           <a:noFill/>
         </p:spPr>
         <p:txBody>
-          <a:bodyPr wrap="square">
+          <a:bodyPr wrap="square" tIns="25400" bIns="0" lIns="0">
             <a:spAutoFit/>
           </a:bodyPr>
           <a:lstStyle/>
           <a:p>
             <a:pPr>
-              <a:defRPr sz="1000">
+              <a:defRPr sz="800">
                 <a:solidFill>
                   <a:srgbClr val="CCCCCC"/>
                 </a:solidFill>
@@ -3299,7 +3299,7 @@
               </a:defRPr>
             </a:pPr>
             <a:r>
-              <a:t>If you enable DynamoDB Streams on a table, you can associate the stream Amazon Resource Name (ARN) with an Lambda functi</a:t>
+              <a:t>If you enable DynamoDB Streams on a table, you can associate the stream Amazon Resource Name (ARN) w</a:t>
             </a:r>
           </a:p>
         </p:txBody>
@@ -3312,8 +3312,8 @@
         </p:nvSpPr>
         <p:spPr>
           <a:xfrm>
-            <a:off x="365760" y="2834640"/>
-            <a:ext cx="274320" cy="274320"/>
+            <a:off x="274320" y="2660904"/>
+            <a:ext cx="201168" cy="201168"/>
           </a:xfrm>
           <a:prstGeom prst="ellipse">
             <a:avLst/>
@@ -3344,7 +3344,7 @@
           <a:lstStyle/>
           <a:p>
             <a:pPr algn="ctr">
-              <a:defRPr sz="900" b="1">
+              <a:defRPr sz="700" b="1">
                 <a:solidFill>
                   <a:srgbClr val="FFFFFF"/>
                 </a:solidFill>
@@ -3364,8 +3364,8 @@
         </p:nvSpPr>
         <p:spPr>
           <a:xfrm>
-            <a:off x="777240" y="2834640"/>
-            <a:ext cx="5943600" cy="411480"/>
+            <a:off x="548640" y="2615184"/>
+            <a:ext cx="6400800" cy="585215"/>
           </a:xfrm>
           <a:prstGeom prst="rect">
             <a:avLst/>
@@ -3373,13 +3373,13 @@
           <a:noFill/>
         </p:spPr>
         <p:txBody>
-          <a:bodyPr wrap="square">
+          <a:bodyPr wrap="square" tIns="25400" bIns="0" lIns="0">
             <a:spAutoFit/>
           </a:bodyPr>
           <a:lstStyle/>
           <a:p>
             <a:pPr>
-              <a:defRPr sz="1000">
+              <a:defRPr sz="800">
                 <a:solidFill>
                   <a:srgbClr val="CCCCCC"/>
                 </a:solidFill>
@@ -3387,7 +3387,7 @@
               </a:defRPr>
             </a:pPr>
             <a:r>
-              <a:t>EventBridge (CloudWatch Events) is used to connect applications with a variety of data. It would not be able to detect u</a:t>
+              <a:t>EventBridge (CloudWatch Events) is used to connect applications with a variety of data. It would not</a:t>
             </a:r>
           </a:p>
         </p:txBody>
@@ -3400,8 +3400,8 @@
         </p:nvSpPr>
         <p:spPr>
           <a:xfrm>
-            <a:off x="365760" y="3291840"/>
-            <a:ext cx="274320" cy="274320"/>
+            <a:off x="274320" y="3264408"/>
+            <a:ext cx="201168" cy="201168"/>
           </a:xfrm>
           <a:prstGeom prst="ellipse">
             <a:avLst/>
@@ -3432,7 +3432,7 @@
           <a:lstStyle/>
           <a:p>
             <a:pPr algn="ctr">
-              <a:defRPr sz="900" b="1">
+              <a:defRPr sz="700" b="1">
                 <a:solidFill>
                   <a:srgbClr val="FFFFFF"/>
                 </a:solidFill>
@@ -3452,8 +3452,8 @@
         </p:nvSpPr>
         <p:spPr>
           <a:xfrm>
-            <a:off x="777240" y="3291840"/>
-            <a:ext cx="5943600" cy="411480"/>
+            <a:off x="548640" y="3218688"/>
+            <a:ext cx="6400800" cy="585215"/>
           </a:xfrm>
           <a:prstGeom prst="rect">
             <a:avLst/>
@@ -3461,13 +3461,13 @@
           <a:noFill/>
         </p:spPr>
         <p:txBody>
-          <a:bodyPr wrap="square">
+          <a:bodyPr wrap="square" tIns="25400" bIns="0" lIns="0">
             <a:spAutoFit/>
           </a:bodyPr>
           <a:lstStyle/>
           <a:p>
             <a:pPr>
-              <a:defRPr sz="1000">
+              <a:defRPr sz="800">
                 <a:solidFill>
                   <a:srgbClr val="CCCCCC"/>
                 </a:solidFill>
@@ -3475,7 +3475,7 @@
               </a:defRPr>
             </a:pPr>
             <a:r>
-              <a:t>A trigger cannot be enabled on a DynamoDB table. To create a trigger, a DynamoDB stream should be enabled on the specifi</a:t>
+              <a:t>A trigger cannot be enabled on a DynamoDB table. To create a trigger, a DynamoDB stream should be en</a:t>
             </a:r>
           </a:p>
         </p:txBody>
@@ -3488,8 +3488,8 @@
         </p:nvSpPr>
         <p:spPr>
           <a:xfrm>
-            <a:off x="365760" y="3749039"/>
-            <a:ext cx="274320" cy="274320"/>
+            <a:off x="274320" y="3867911"/>
+            <a:ext cx="201168" cy="201168"/>
           </a:xfrm>
           <a:prstGeom prst="ellipse">
             <a:avLst/>
@@ -3520,7 +3520,7 @@
           <a:lstStyle/>
           <a:p>
             <a:pPr algn="ctr">
-              <a:defRPr sz="900" b="1">
+              <a:defRPr sz="700" b="1">
                 <a:solidFill>
                   <a:srgbClr val="FFFFFF"/>
                 </a:solidFill>
@@ -3540,8 +3540,8 @@
         </p:nvSpPr>
         <p:spPr>
           <a:xfrm>
-            <a:off x="777240" y="3749039"/>
-            <a:ext cx="5943600" cy="411480"/>
+            <a:off x="548640" y="3822191"/>
+            <a:ext cx="6400800" cy="585215"/>
           </a:xfrm>
           <a:prstGeom prst="rect">
             <a:avLst/>
@@ -3549,13 +3549,13 @@
           <a:noFill/>
         </p:spPr>
         <p:txBody>
-          <a:bodyPr wrap="square">
+          <a:bodyPr wrap="square" tIns="25400" bIns="0" lIns="0">
             <a:spAutoFit/>
           </a:bodyPr>
           <a:lstStyle/>
           <a:p>
             <a:pPr>
-              <a:defRPr sz="1000">
+              <a:defRPr sz="800">
                 <a:solidFill>
                   <a:srgbClr val="CCCCCC"/>
                 </a:solidFill>
@@ -3576,8 +3576,8 @@
         </p:nvSpPr>
         <p:spPr>
           <a:xfrm>
-            <a:off x="365760" y="4206240"/>
-            <a:ext cx="274320" cy="274320"/>
+            <a:off x="274320" y="4471416"/>
+            <a:ext cx="201168" cy="201168"/>
           </a:xfrm>
           <a:prstGeom prst="ellipse">
             <a:avLst/>
@@ -3608,7 +3608,7 @@
           <a:lstStyle/>
           <a:p>
             <a:pPr algn="ctr">
-              <a:defRPr sz="900" b="1">
+              <a:defRPr sz="700" b="1">
                 <a:solidFill>
                   <a:srgbClr val="FFFFFF"/>
                 </a:solidFill>
@@ -3628,8 +3628,8 @@
         </p:nvSpPr>
         <p:spPr>
           <a:xfrm>
-            <a:off x="777240" y="4206240"/>
-            <a:ext cx="5943600" cy="411480"/>
+            <a:off x="548640" y="4425696"/>
+            <a:ext cx="6400800" cy="585215"/>
           </a:xfrm>
           <a:prstGeom prst="rect">
             <a:avLst/>
@@ -3637,13 +3637,13 @@
           <a:noFill/>
         </p:spPr>
         <p:txBody>
-          <a:bodyPr wrap="square">
+          <a:bodyPr wrap="square" tIns="25400" bIns="0" lIns="0">
             <a:spAutoFit/>
           </a:bodyPr>
           <a:lstStyle/>
           <a:p>
             <a:pPr>
-              <a:defRPr sz="1000">
+              <a:defRPr sz="800">
                 <a:solidFill>
                   <a:srgbClr val="CCCCCC"/>
                 </a:solidFill>
@@ -3933,8 +3933,8 @@
         </p:blipFill>
         <p:spPr>
           <a:xfrm>
-            <a:off x="182880" y="1466854"/>
-            <a:ext cx="5303520" cy="2735570"/>
+            <a:off x="182880" y="1972563"/>
+            <a:ext cx="5303520" cy="1724152"/>
           </a:xfrm>
           <a:prstGeom prst="rect">
             <a:avLst/>
@@ -4069,9 +4069,9 @@
           <a:p>
             <a:pPr>
               <a:spcAft>
-                <a:spcPts val="600"/>
+                <a:spcPts val="400"/>
               </a:spcAft>
-              <a:defRPr sz="900">
+              <a:defRPr sz="800">
                 <a:solidFill>
                   <a:srgbClr val="212121"/>
                 </a:solidFill>
@@ -4079,15 +4079,15 @@
               </a:defRPr>
             </a:pPr>
             <a:r>
-              <a:t>• If you enable DynamoDB Streams on a table, you can associate the stream Amazon Resource Name (ARN) with an Lambda function that you write.</a:t>
+              <a:t>• If you enable DynamoDB Streams on a table</a:t>
             </a:r>
           </a:p>
           <a:p>
             <a:pPr>
               <a:spcAft>
-                <a:spcPts val="600"/>
+                <a:spcPts val="400"/>
               </a:spcAft>
-              <a:defRPr sz="900">
+              <a:defRPr sz="800">
                 <a:solidFill>
                   <a:srgbClr val="212121"/>
                 </a:solidFill>
@@ -4095,15 +4095,15 @@
               </a:defRPr>
             </a:pPr>
             <a:r>
-              <a:t>• Immediately after an item in the table is modified, a new record appears in the table's stream.</a:t>
+              <a:t>• You can associate the stream Amazon Resource Name (ARN) with an Lambda function that you write</a:t>
             </a:r>
           </a:p>
           <a:p>
             <a:pPr>
               <a:spcAft>
-                <a:spcPts val="600"/>
+                <a:spcPts val="400"/>
               </a:spcAft>
-              <a:defRPr sz="900">
+              <a:defRPr sz="800">
                 <a:solidFill>
                   <a:srgbClr val="212121"/>
                 </a:solidFill>
@@ -4111,7 +4111,39 @@
               </a:defRPr>
             </a:pPr>
             <a:r>
-              <a:t>• Lambda polls the stream and invokes your Lambda function synchronously when it detects new stream records.</a:t>
+              <a:t>• Immediately after an item in the table is modified</a:t>
+            </a:r>
+          </a:p>
+          <a:p>
+            <a:pPr>
+              <a:spcAft>
+                <a:spcPts val="400"/>
+              </a:spcAft>
+              <a:defRPr sz="800">
+                <a:solidFill>
+                  <a:srgbClr val="212121"/>
+                </a:solidFill>
+                <a:latin typeface="Segoe UI"/>
+              </a:defRPr>
+            </a:pPr>
+            <a:r>
+              <a:t>• A new record appears in the table's stream</a:t>
+            </a:r>
+          </a:p>
+          <a:p>
+            <a:pPr>
+              <a:spcAft>
+                <a:spcPts val="400"/>
+              </a:spcAft>
+              <a:defRPr sz="800">
+                <a:solidFill>
+                  <a:srgbClr val="212121"/>
+                </a:solidFill>
+                <a:latin typeface="Segoe UI"/>
+              </a:defRPr>
+            </a:pPr>
+            <a:r>
+              <a:t>• Lambda polls the stream and invokes your Lambda function synchronously when it detects new stream records</a:t>
             </a:r>
           </a:p>
         </p:txBody>
@@ -4290,8 +4322,8 @@
         </p:blipFill>
         <p:spPr>
           <a:xfrm>
-            <a:off x="182880" y="1466854"/>
-            <a:ext cx="5303520" cy="2735570"/>
+            <a:off x="182880" y="1366552"/>
+            <a:ext cx="5303520" cy="2936175"/>
           </a:xfrm>
           <a:prstGeom prst="rect">
             <a:avLst/>
@@ -4426,9 +4458,9 @@
           <a:p>
             <a:pPr>
               <a:spcAft>
-                <a:spcPts val="600"/>
+                <a:spcPts val="400"/>
               </a:spcAft>
-              <a:defRPr sz="900">
+              <a:defRPr sz="800">
                 <a:solidFill>
                   <a:srgbClr val="212121"/>
                 </a:solidFill>
@@ -4436,15 +4468,15 @@
               </a:defRPr>
             </a:pPr>
             <a:r>
-              <a:t>• EventBridge (CloudWatch Events) is used to connect applications with a variety of data.</a:t>
+              <a:t>• EventBridge (CloudWatch Events) is used to connect applications with a variety of data</a:t>
             </a:r>
           </a:p>
           <a:p>
             <a:pPr>
               <a:spcAft>
-                <a:spcPts val="600"/>
+                <a:spcPts val="400"/>
               </a:spcAft>
-              <a:defRPr sz="900">
+              <a:defRPr sz="800">
                 <a:solidFill>
                   <a:srgbClr val="212121"/>
                 </a:solidFill>
@@ -4452,7 +4484,7 @@
               </a:defRPr>
             </a:pPr>
             <a:r>
-              <a:t>• It would not be able to detect updates to a DynamoDB table.</a:t>
+              <a:t>• It would not be able to detect updates to a DynamoDB table</a:t>
             </a:r>
           </a:p>
         </p:txBody>
@@ -4631,8 +4663,8 @@
         </p:blipFill>
         <p:spPr>
           <a:xfrm>
-            <a:off x="182880" y="914400"/>
-            <a:ext cx="3228638" cy="3840480"/>
+            <a:off x="182880" y="1250228"/>
+            <a:ext cx="5303520" cy="3168822"/>
           </a:xfrm>
           <a:prstGeom prst="rect">
             <a:avLst/>
@@ -4767,9 +4799,9 @@
           <a:p>
             <a:pPr>
               <a:spcAft>
-                <a:spcPts val="600"/>
+                <a:spcPts val="400"/>
               </a:spcAft>
-              <a:defRPr sz="900">
+              <a:defRPr sz="800">
                 <a:solidFill>
                   <a:srgbClr val="212121"/>
                 </a:solidFill>
@@ -4777,15 +4809,15 @@
               </a:defRPr>
             </a:pPr>
             <a:r>
-              <a:t>• A trigger cannot be enabled on a DynamoDB table.</a:t>
+              <a:t>• A trigger cannot be enabled on a DynamoDB table</a:t>
             </a:r>
           </a:p>
           <a:p>
             <a:pPr>
               <a:spcAft>
-                <a:spcPts val="600"/>
+                <a:spcPts val="400"/>
               </a:spcAft>
-              <a:defRPr sz="900">
+              <a:defRPr sz="800">
                 <a:solidFill>
                   <a:srgbClr val="212121"/>
                 </a:solidFill>
@@ -4793,7 +4825,7 @@
               </a:defRPr>
             </a:pPr>
             <a:r>
-              <a:t>• To create a trigger, a DynamoDB stream should be enabled on the specific DynamoDB table.</a:t>
+              <a:t>• To create a trigger, a DynamoDB stream should be enabled on the specific DynamoDB table</a:t>
             </a:r>
           </a:p>
         </p:txBody>
@@ -4972,8 +5004,8 @@
         </p:blipFill>
         <p:spPr>
           <a:xfrm>
-            <a:off x="182880" y="914400"/>
-            <a:ext cx="5280660" cy="3840480"/>
+            <a:off x="182880" y="1369303"/>
+            <a:ext cx="5303520" cy="2930673"/>
           </a:xfrm>
           <a:prstGeom prst="rect">
             <a:avLst/>
@@ -5108,9 +5140,9 @@
           <a:p>
             <a:pPr>
               <a:spcAft>
-                <a:spcPts val="600"/>
+                <a:spcPts val="400"/>
               </a:spcAft>
-              <a:defRPr sz="900">
+              <a:defRPr sz="800">
                 <a:solidFill>
                   <a:srgbClr val="212121"/>
                 </a:solidFill>
@@ -5118,7 +5150,7 @@
               </a:defRPr>
             </a:pPr>
             <a:r>
-              <a:t>• A DynamoDB stream cannot be used to create an Amazon SNS topic.</a:t>
+              <a:t>• A DynamoDB stream cannot be used to create an Amazon SNS topic</a:t>
             </a:r>
           </a:p>
         </p:txBody>
@@ -5297,8 +5329,8 @@
         </p:blipFill>
         <p:spPr>
           <a:xfrm>
-            <a:off x="182880" y="914400"/>
-            <a:ext cx="5280660" cy="3840480"/>
+            <a:off x="182880" y="2030380"/>
+            <a:ext cx="5303520" cy="1608519"/>
           </a:xfrm>
           <a:prstGeom prst="rect">
             <a:avLst/>
@@ -5433,9 +5465,9 @@
           <a:p>
             <a:pPr>
               <a:spcAft>
-                <a:spcPts val="600"/>
+                <a:spcPts val="400"/>
               </a:spcAft>
-              <a:defRPr sz="900">
+              <a:defRPr sz="800">
                 <a:solidFill>
                   <a:srgbClr val="212121"/>
                 </a:solidFill>
@@ -5443,7 +5475,7 @@
               </a:defRPr>
             </a:pPr>
             <a:r>
-              <a:t>• You can enable DynamoDB Streams on a table to create an event that invokes an AWS Lambda function.</a:t>
+              <a:t>• You can enable DynamoDB Streams on a table to create an event that invokes an AWS Lambda function</a:t>
             </a:r>
           </a:p>
         </p:txBody>

--- a/session4/exam-strategy/q4/q4_exam_strategy.pptx
+++ b/session4/exam-strategy/q4/q4_exam_strategy.pptx
@@ -3188,8 +3188,8 @@
         </p:nvSpPr>
         <p:spPr>
           <a:xfrm>
-            <a:off x="274320" y="640080"/>
-            <a:ext cx="6583680" cy="1280160"/>
+            <a:off x="274320" y="685800"/>
+            <a:ext cx="6400800" cy="1645920"/>
           </a:xfrm>
           <a:prstGeom prst="rect">
             <a:avLst/>
@@ -3197,13 +3197,13 @@
           <a:noFill/>
         </p:spPr>
         <p:txBody>
-          <a:bodyPr wrap="square" tIns="0" bIns="0">
+          <a:bodyPr wrap="square">
             <a:spAutoFit/>
           </a:bodyPr>
           <a:lstStyle/>
           <a:p>
             <a:pPr>
-              <a:defRPr sz="900">
+              <a:defRPr sz="1100">
                 <a:solidFill>
                   <a:srgbClr val="FFFFFF"/>
                 </a:solidFill>
@@ -3224,8 +3224,8 @@
         </p:nvSpPr>
         <p:spPr>
           <a:xfrm>
-            <a:off x="274320" y="2057400"/>
-            <a:ext cx="201168" cy="201168"/>
+            <a:off x="365760" y="2377440"/>
+            <a:ext cx="274320" cy="274320"/>
           </a:xfrm>
           <a:prstGeom prst="ellipse">
             <a:avLst/>
@@ -3256,7 +3256,7 @@
           <a:lstStyle/>
           <a:p>
             <a:pPr algn="ctr">
-              <a:defRPr sz="700" b="1">
+              <a:defRPr sz="900" b="1">
                 <a:solidFill>
                   <a:srgbClr val="FFFFFF"/>
                 </a:solidFill>
@@ -3276,8 +3276,8 @@
         </p:nvSpPr>
         <p:spPr>
           <a:xfrm>
-            <a:off x="548640" y="2011680"/>
-            <a:ext cx="6400800" cy="585215"/>
+            <a:off x="777240" y="2377440"/>
+            <a:ext cx="5943600" cy="411480"/>
           </a:xfrm>
           <a:prstGeom prst="rect">
             <a:avLst/>
@@ -3285,13 +3285,13 @@
           <a:noFill/>
         </p:spPr>
         <p:txBody>
-          <a:bodyPr wrap="square" tIns="25400" bIns="0" lIns="0">
+          <a:bodyPr wrap="square">
             <a:spAutoFit/>
           </a:bodyPr>
           <a:lstStyle/>
           <a:p>
             <a:pPr>
-              <a:defRPr sz="800">
+              <a:defRPr sz="1000">
                 <a:solidFill>
                   <a:srgbClr val="CCCCCC"/>
                 </a:solidFill>
@@ -3299,7 +3299,7 @@
               </a:defRPr>
             </a:pPr>
             <a:r>
-              <a:t>If you enable DynamoDB Streams on a table, you can associate the stream Amazon Resource Name (ARN) w</a:t>
+              <a:t>If you enable DynamoDB Streams on a table, you can associate the stream Amazon Resource Name (ARN) with an Lambda functi</a:t>
             </a:r>
           </a:p>
         </p:txBody>
@@ -3312,8 +3312,8 @@
         </p:nvSpPr>
         <p:spPr>
           <a:xfrm>
-            <a:off x="274320" y="2660904"/>
-            <a:ext cx="201168" cy="201168"/>
+            <a:off x="365760" y="2834640"/>
+            <a:ext cx="274320" cy="274320"/>
           </a:xfrm>
           <a:prstGeom prst="ellipse">
             <a:avLst/>
@@ -3344,7 +3344,7 @@
           <a:lstStyle/>
           <a:p>
             <a:pPr algn="ctr">
-              <a:defRPr sz="700" b="1">
+              <a:defRPr sz="900" b="1">
                 <a:solidFill>
                   <a:srgbClr val="FFFFFF"/>
                 </a:solidFill>
@@ -3364,8 +3364,8 @@
         </p:nvSpPr>
         <p:spPr>
           <a:xfrm>
-            <a:off x="548640" y="2615184"/>
-            <a:ext cx="6400800" cy="585215"/>
+            <a:off x="777240" y="2834640"/>
+            <a:ext cx="5943600" cy="411480"/>
           </a:xfrm>
           <a:prstGeom prst="rect">
             <a:avLst/>
@@ -3373,13 +3373,13 @@
           <a:noFill/>
         </p:spPr>
         <p:txBody>
-          <a:bodyPr wrap="square" tIns="25400" bIns="0" lIns="0">
+          <a:bodyPr wrap="square">
             <a:spAutoFit/>
           </a:bodyPr>
           <a:lstStyle/>
           <a:p>
             <a:pPr>
-              <a:defRPr sz="800">
+              <a:defRPr sz="1000">
                 <a:solidFill>
                   <a:srgbClr val="CCCCCC"/>
                 </a:solidFill>
@@ -3387,7 +3387,7 @@
               </a:defRPr>
             </a:pPr>
             <a:r>
-              <a:t>EventBridge (CloudWatch Events) is used to connect applications with a variety of data. It would not</a:t>
+              <a:t>EventBridge (CloudWatch Events) is used to connect applications with a variety of data. It would not be able to detect u</a:t>
             </a:r>
           </a:p>
         </p:txBody>
@@ -3400,8 +3400,8 @@
         </p:nvSpPr>
         <p:spPr>
           <a:xfrm>
-            <a:off x="274320" y="3264408"/>
-            <a:ext cx="201168" cy="201168"/>
+            <a:off x="365760" y="3291840"/>
+            <a:ext cx="274320" cy="274320"/>
           </a:xfrm>
           <a:prstGeom prst="ellipse">
             <a:avLst/>
@@ -3432,7 +3432,7 @@
           <a:lstStyle/>
           <a:p>
             <a:pPr algn="ctr">
-              <a:defRPr sz="700" b="1">
+              <a:defRPr sz="900" b="1">
                 <a:solidFill>
                   <a:srgbClr val="FFFFFF"/>
                 </a:solidFill>
@@ -3452,8 +3452,8 @@
         </p:nvSpPr>
         <p:spPr>
           <a:xfrm>
-            <a:off x="548640" y="3218688"/>
-            <a:ext cx="6400800" cy="585215"/>
+            <a:off x="777240" y="3291840"/>
+            <a:ext cx="5943600" cy="411480"/>
           </a:xfrm>
           <a:prstGeom prst="rect">
             <a:avLst/>
@@ -3461,13 +3461,13 @@
           <a:noFill/>
         </p:spPr>
         <p:txBody>
-          <a:bodyPr wrap="square" tIns="25400" bIns="0" lIns="0">
+          <a:bodyPr wrap="square">
             <a:spAutoFit/>
           </a:bodyPr>
           <a:lstStyle/>
           <a:p>
             <a:pPr>
-              <a:defRPr sz="800">
+              <a:defRPr sz="1000">
                 <a:solidFill>
                   <a:srgbClr val="CCCCCC"/>
                 </a:solidFill>
@@ -3475,7 +3475,7 @@
               </a:defRPr>
             </a:pPr>
             <a:r>
-              <a:t>A trigger cannot be enabled on a DynamoDB table. To create a trigger, a DynamoDB stream should be en</a:t>
+              <a:t>A trigger cannot be enabled on a DynamoDB table. To create a trigger, a DynamoDB stream should be enabled on the specifi</a:t>
             </a:r>
           </a:p>
         </p:txBody>
@@ -3488,8 +3488,8 @@
         </p:nvSpPr>
         <p:spPr>
           <a:xfrm>
-            <a:off x="274320" y="3867911"/>
-            <a:ext cx="201168" cy="201168"/>
+            <a:off x="365760" y="3749039"/>
+            <a:ext cx="274320" cy="274320"/>
           </a:xfrm>
           <a:prstGeom prst="ellipse">
             <a:avLst/>
@@ -3520,7 +3520,7 @@
           <a:lstStyle/>
           <a:p>
             <a:pPr algn="ctr">
-              <a:defRPr sz="700" b="1">
+              <a:defRPr sz="900" b="1">
                 <a:solidFill>
                   <a:srgbClr val="FFFFFF"/>
                 </a:solidFill>
@@ -3540,8 +3540,8 @@
         </p:nvSpPr>
         <p:spPr>
           <a:xfrm>
-            <a:off x="548640" y="3822191"/>
-            <a:ext cx="6400800" cy="585215"/>
+            <a:off x="777240" y="3749039"/>
+            <a:ext cx="5943600" cy="411480"/>
           </a:xfrm>
           <a:prstGeom prst="rect">
             <a:avLst/>
@@ -3549,13 +3549,13 @@
           <a:noFill/>
         </p:spPr>
         <p:txBody>
-          <a:bodyPr wrap="square" tIns="25400" bIns="0" lIns="0">
+          <a:bodyPr wrap="square">
             <a:spAutoFit/>
           </a:bodyPr>
           <a:lstStyle/>
           <a:p>
             <a:pPr>
-              <a:defRPr sz="800">
+              <a:defRPr sz="1000">
                 <a:solidFill>
                   <a:srgbClr val="CCCCCC"/>
                 </a:solidFill>
@@ -3576,8 +3576,8 @@
         </p:nvSpPr>
         <p:spPr>
           <a:xfrm>
-            <a:off x="274320" y="4471416"/>
-            <a:ext cx="201168" cy="201168"/>
+            <a:off x="365760" y="4206240"/>
+            <a:ext cx="274320" cy="274320"/>
           </a:xfrm>
           <a:prstGeom prst="ellipse">
             <a:avLst/>
@@ -3608,7 +3608,7 @@
           <a:lstStyle/>
           <a:p>
             <a:pPr algn="ctr">
-              <a:defRPr sz="700" b="1">
+              <a:defRPr sz="900" b="1">
                 <a:solidFill>
                   <a:srgbClr val="FFFFFF"/>
                 </a:solidFill>
@@ -3628,8 +3628,8 @@
         </p:nvSpPr>
         <p:spPr>
           <a:xfrm>
-            <a:off x="548640" y="4425696"/>
-            <a:ext cx="6400800" cy="585215"/>
+            <a:off x="777240" y="4206240"/>
+            <a:ext cx="5943600" cy="411480"/>
           </a:xfrm>
           <a:prstGeom prst="rect">
             <a:avLst/>
@@ -3637,13 +3637,13 @@
           <a:noFill/>
         </p:spPr>
         <p:txBody>
-          <a:bodyPr wrap="square" tIns="25400" bIns="0" lIns="0">
+          <a:bodyPr wrap="square">
             <a:spAutoFit/>
           </a:bodyPr>
           <a:lstStyle/>
           <a:p>
             <a:pPr>
-              <a:defRPr sz="800">
+              <a:defRPr sz="1000">
                 <a:solidFill>
                   <a:srgbClr val="CCCCCC"/>
                 </a:solidFill>
@@ -3933,8 +3933,8 @@
         </p:blipFill>
         <p:spPr>
           <a:xfrm>
-            <a:off x="182880" y="1972563"/>
-            <a:ext cx="5303520" cy="1724152"/>
+            <a:off x="182880" y="2223956"/>
+            <a:ext cx="5303520" cy="1221367"/>
           </a:xfrm>
           <a:prstGeom prst="rect">
             <a:avLst/>
@@ -4069,9 +4069,9 @@
           <a:p>
             <a:pPr>
               <a:spcAft>
-                <a:spcPts val="400"/>
+                <a:spcPts val="600"/>
               </a:spcAft>
-              <a:defRPr sz="800">
+              <a:defRPr sz="900">
                 <a:solidFill>
                   <a:srgbClr val="212121"/>
                 </a:solidFill>
@@ -4079,15 +4079,15 @@
               </a:defRPr>
             </a:pPr>
             <a:r>
-              <a:t>• If you enable DynamoDB Streams on a table</a:t>
+              <a:t>• If you enable DynamoDB Streams on a table, you can associate the stream Amazon Resource Name (ARN) with an Lambda function that you write.</a:t>
             </a:r>
           </a:p>
           <a:p>
             <a:pPr>
               <a:spcAft>
-                <a:spcPts val="400"/>
+                <a:spcPts val="600"/>
               </a:spcAft>
-              <a:defRPr sz="800">
+              <a:defRPr sz="900">
                 <a:solidFill>
                   <a:srgbClr val="212121"/>
                 </a:solidFill>
@@ -4095,15 +4095,15 @@
               </a:defRPr>
             </a:pPr>
             <a:r>
-              <a:t>• You can associate the stream Amazon Resource Name (ARN) with an Lambda function that you write</a:t>
+              <a:t>• Immediately after an item in the table is modified, a new record appears in the table's stream.</a:t>
             </a:r>
           </a:p>
           <a:p>
             <a:pPr>
               <a:spcAft>
-                <a:spcPts val="400"/>
+                <a:spcPts val="600"/>
               </a:spcAft>
-              <a:defRPr sz="800">
+              <a:defRPr sz="900">
                 <a:solidFill>
                   <a:srgbClr val="212121"/>
                 </a:solidFill>
@@ -4111,39 +4111,7 @@
               </a:defRPr>
             </a:pPr>
             <a:r>
-              <a:t>• Immediately after an item in the table is modified</a:t>
-            </a:r>
-          </a:p>
-          <a:p>
-            <a:pPr>
-              <a:spcAft>
-                <a:spcPts val="400"/>
-              </a:spcAft>
-              <a:defRPr sz="800">
-                <a:solidFill>
-                  <a:srgbClr val="212121"/>
-                </a:solidFill>
-                <a:latin typeface="Segoe UI"/>
-              </a:defRPr>
-            </a:pPr>
-            <a:r>
-              <a:t>• A new record appears in the table's stream</a:t>
-            </a:r>
-          </a:p>
-          <a:p>
-            <a:pPr>
-              <a:spcAft>
-                <a:spcPts val="400"/>
-              </a:spcAft>
-              <a:defRPr sz="800">
-                <a:solidFill>
-                  <a:srgbClr val="212121"/>
-                </a:solidFill>
-                <a:latin typeface="Segoe UI"/>
-              </a:defRPr>
-            </a:pPr>
-            <a:r>
-              <a:t>• Lambda polls the stream and invokes your Lambda function synchronously when it detects new stream records</a:t>
+              <a:t>• Lambda polls the stream and invokes your Lambda function synchronously when it detects new stream records.</a:t>
             </a:r>
           </a:p>
         </p:txBody>
@@ -4322,8 +4290,8 @@
         </p:blipFill>
         <p:spPr>
           <a:xfrm>
-            <a:off x="182880" y="1366552"/>
-            <a:ext cx="5303520" cy="2936175"/>
+            <a:off x="182880" y="1601737"/>
+            <a:ext cx="5303520" cy="2465805"/>
           </a:xfrm>
           <a:prstGeom prst="rect">
             <a:avLst/>
@@ -4458,9 +4426,9 @@
           <a:p>
             <a:pPr>
               <a:spcAft>
-                <a:spcPts val="400"/>
+                <a:spcPts val="600"/>
               </a:spcAft>
-              <a:defRPr sz="800">
+              <a:defRPr sz="900">
                 <a:solidFill>
                   <a:srgbClr val="212121"/>
                 </a:solidFill>
@@ -4468,15 +4436,15 @@
               </a:defRPr>
             </a:pPr>
             <a:r>
-              <a:t>• EventBridge (CloudWatch Events) is used to connect applications with a variety of data</a:t>
+              <a:t>• EventBridge (CloudWatch Events) is used to connect applications with a variety of data.</a:t>
             </a:r>
           </a:p>
           <a:p>
             <a:pPr>
               <a:spcAft>
-                <a:spcPts val="400"/>
+                <a:spcPts val="600"/>
               </a:spcAft>
-              <a:defRPr sz="800">
+              <a:defRPr sz="900">
                 <a:solidFill>
                   <a:srgbClr val="212121"/>
                 </a:solidFill>
@@ -4484,7 +4452,7 @@
               </a:defRPr>
             </a:pPr>
             <a:r>
-              <a:t>• It would not be able to detect updates to a DynamoDB table</a:t>
+              <a:t>• It would not be able to detect updates to a DynamoDB table.</a:t>
             </a:r>
           </a:p>
         </p:txBody>
@@ -4663,8 +4631,8 @@
         </p:blipFill>
         <p:spPr>
           <a:xfrm>
-            <a:off x="182880" y="1250228"/>
-            <a:ext cx="5303520" cy="3168822"/>
+            <a:off x="182880" y="1387342"/>
+            <a:ext cx="5303520" cy="2894595"/>
           </a:xfrm>
           <a:prstGeom prst="rect">
             <a:avLst/>
@@ -4799,9 +4767,9 @@
           <a:p>
             <a:pPr>
               <a:spcAft>
-                <a:spcPts val="400"/>
+                <a:spcPts val="600"/>
               </a:spcAft>
-              <a:defRPr sz="800">
+              <a:defRPr sz="900">
                 <a:solidFill>
                   <a:srgbClr val="212121"/>
                 </a:solidFill>
@@ -4809,15 +4777,15 @@
               </a:defRPr>
             </a:pPr>
             <a:r>
-              <a:t>• A trigger cannot be enabled on a DynamoDB table</a:t>
+              <a:t>• A trigger cannot be enabled on a DynamoDB table.</a:t>
             </a:r>
           </a:p>
           <a:p>
             <a:pPr>
               <a:spcAft>
-                <a:spcPts val="400"/>
+                <a:spcPts val="600"/>
               </a:spcAft>
-              <a:defRPr sz="800">
+              <a:defRPr sz="900">
                 <a:solidFill>
                   <a:srgbClr val="212121"/>
                 </a:solidFill>
@@ -4825,7 +4793,7 @@
               </a:defRPr>
             </a:pPr>
             <a:r>
-              <a:t>• To create a trigger, a DynamoDB stream should be enabled on the specific DynamoDB table</a:t>
+              <a:t>• To create a trigger, a DynamoDB stream should be enabled on the specific DynamoDB table.</a:t>
             </a:r>
           </a:p>
         </p:txBody>
@@ -5004,8 +4972,8 @@
         </p:blipFill>
         <p:spPr>
           <a:xfrm>
-            <a:off x="182880" y="1369303"/>
-            <a:ext cx="5303520" cy="2930673"/>
+            <a:off x="182880" y="1644053"/>
+            <a:ext cx="5303520" cy="2381172"/>
           </a:xfrm>
           <a:prstGeom prst="rect">
             <a:avLst/>
@@ -5140,9 +5108,9 @@
           <a:p>
             <a:pPr>
               <a:spcAft>
-                <a:spcPts val="400"/>
+                <a:spcPts val="600"/>
               </a:spcAft>
-              <a:defRPr sz="800">
+              <a:defRPr sz="900">
                 <a:solidFill>
                   <a:srgbClr val="212121"/>
                 </a:solidFill>
@@ -5150,7 +5118,7 @@
               </a:defRPr>
             </a:pPr>
             <a:r>
-              <a:t>• A DynamoDB stream cannot be used to create an Amazon SNS topic</a:t>
+              <a:t>• A DynamoDB stream cannot be used to create an Amazon SNS topic.</a:t>
             </a:r>
           </a:p>
         </p:txBody>
@@ -5329,8 +5297,8 @@
         </p:blipFill>
         <p:spPr>
           <a:xfrm>
-            <a:off x="182880" y="2030380"/>
-            <a:ext cx="5303520" cy="1608519"/>
+            <a:off x="182880" y="1779169"/>
+            <a:ext cx="5303520" cy="2110940"/>
           </a:xfrm>
           <a:prstGeom prst="rect">
             <a:avLst/>
@@ -5465,9 +5433,9 @@
           <a:p>
             <a:pPr>
               <a:spcAft>
-                <a:spcPts val="400"/>
+                <a:spcPts val="600"/>
               </a:spcAft>
-              <a:defRPr sz="800">
+              <a:defRPr sz="900">
                 <a:solidFill>
                   <a:srgbClr val="212121"/>
                 </a:solidFill>
@@ -5475,7 +5443,7 @@
               </a:defRPr>
             </a:pPr>
             <a:r>
-              <a:t>• You can enable DynamoDB Streams on a table to create an event that invokes an AWS Lambda function</a:t>
+              <a:t>• You can enable DynamoDB Streams on a table to create an event that invokes an AWS Lambda function.</a:t>
             </a:r>
           </a:p>
         </p:txBody>
